--- a/ゲーム科2年/00_前期/ゲーム開発Ⅰ/08_球の当たり判定.pptx
+++ b/ゲーム科2年/00_前期/ゲーム開発Ⅰ/08_球の当たり判定.pptx
@@ -265,7 +265,7 @@
           <a:p>
             <a:fld id="{E9CC885B-4903-4D54-9A93-00025F12DED9}" type="datetimeFigureOut">
               <a:rPr kumimoji="1" lang="ja-JP" altLang="en-US" smtClean="0"/>
-              <a:t>2024/9/26</a:t>
+              <a:t>2025/1/6</a:t>
             </a:fld>
             <a:endParaRPr kumimoji="1" lang="ja-JP" altLang="en-US"/>
           </a:p>
@@ -495,7 +495,7 @@
           <a:p>
             <a:fld id="{E9CC885B-4903-4D54-9A93-00025F12DED9}" type="datetimeFigureOut">
               <a:rPr kumimoji="1" lang="ja-JP" altLang="en-US" smtClean="0"/>
-              <a:t>2024/9/26</a:t>
+              <a:t>2025/1/6</a:t>
             </a:fld>
             <a:endParaRPr kumimoji="1" lang="ja-JP" altLang="en-US"/>
           </a:p>
@@ -735,7 +735,7 @@
           <a:p>
             <a:fld id="{E9CC885B-4903-4D54-9A93-00025F12DED9}" type="datetimeFigureOut">
               <a:rPr kumimoji="1" lang="ja-JP" altLang="en-US" smtClean="0"/>
-              <a:t>2024/9/26</a:t>
+              <a:t>2025/1/6</a:t>
             </a:fld>
             <a:endParaRPr kumimoji="1" lang="ja-JP" altLang="en-US"/>
           </a:p>
@@ -965,7 +965,7 @@
           <a:p>
             <a:fld id="{E9CC885B-4903-4D54-9A93-00025F12DED9}" type="datetimeFigureOut">
               <a:rPr kumimoji="1" lang="ja-JP" altLang="en-US" smtClean="0"/>
-              <a:t>2024/9/26</a:t>
+              <a:t>2025/1/6</a:t>
             </a:fld>
             <a:endParaRPr kumimoji="1" lang="ja-JP" altLang="en-US"/>
           </a:p>
@@ -1240,7 +1240,7 @@
           <a:p>
             <a:fld id="{E9CC885B-4903-4D54-9A93-00025F12DED9}" type="datetimeFigureOut">
               <a:rPr kumimoji="1" lang="ja-JP" altLang="en-US" smtClean="0"/>
-              <a:t>2024/9/26</a:t>
+              <a:t>2025/1/6</a:t>
             </a:fld>
             <a:endParaRPr kumimoji="1" lang="ja-JP" altLang="en-US"/>
           </a:p>
@@ -1569,7 +1569,7 @@
           <a:p>
             <a:fld id="{E9CC885B-4903-4D54-9A93-00025F12DED9}" type="datetimeFigureOut">
               <a:rPr kumimoji="1" lang="ja-JP" altLang="en-US" smtClean="0"/>
-              <a:t>2024/9/26</a:t>
+              <a:t>2025/1/6</a:t>
             </a:fld>
             <a:endParaRPr kumimoji="1" lang="ja-JP" altLang="en-US"/>
           </a:p>
@@ -2045,7 +2045,7 @@
           <a:p>
             <a:fld id="{E9CC885B-4903-4D54-9A93-00025F12DED9}" type="datetimeFigureOut">
               <a:rPr kumimoji="1" lang="ja-JP" altLang="en-US" smtClean="0"/>
-              <a:t>2024/9/26</a:t>
+              <a:t>2025/1/6</a:t>
             </a:fld>
             <a:endParaRPr kumimoji="1" lang="ja-JP" altLang="en-US"/>
           </a:p>
@@ -2186,7 +2186,7 @@
           <a:p>
             <a:fld id="{E9CC885B-4903-4D54-9A93-00025F12DED9}" type="datetimeFigureOut">
               <a:rPr kumimoji="1" lang="ja-JP" altLang="en-US" smtClean="0"/>
-              <a:t>2024/9/26</a:t>
+              <a:t>2025/1/6</a:t>
             </a:fld>
             <a:endParaRPr kumimoji="1" lang="ja-JP" altLang="en-US"/>
           </a:p>
@@ -2299,7 +2299,7 @@
           <a:p>
             <a:fld id="{E9CC885B-4903-4D54-9A93-00025F12DED9}" type="datetimeFigureOut">
               <a:rPr kumimoji="1" lang="ja-JP" altLang="en-US" smtClean="0"/>
-              <a:t>2024/9/26</a:t>
+              <a:t>2025/1/6</a:t>
             </a:fld>
             <a:endParaRPr kumimoji="1" lang="ja-JP" altLang="en-US"/>
           </a:p>
@@ -2642,7 +2642,7 @@
           <a:p>
             <a:fld id="{E9CC885B-4903-4D54-9A93-00025F12DED9}" type="datetimeFigureOut">
               <a:rPr kumimoji="1" lang="ja-JP" altLang="en-US" smtClean="0"/>
-              <a:t>2024/9/26</a:t>
+              <a:t>2025/1/6</a:t>
             </a:fld>
             <a:endParaRPr kumimoji="1" lang="ja-JP" altLang="en-US"/>
           </a:p>
@@ -2930,7 +2930,7 @@
           <a:p>
             <a:fld id="{E9CC885B-4903-4D54-9A93-00025F12DED9}" type="datetimeFigureOut">
               <a:rPr kumimoji="1" lang="ja-JP" altLang="en-US" smtClean="0"/>
-              <a:t>2024/9/26</a:t>
+              <a:t>2025/1/6</a:t>
             </a:fld>
             <a:endParaRPr kumimoji="1" lang="ja-JP" altLang="en-US"/>
           </a:p>
@@ -3203,7 +3203,7 @@
           <a:p>
             <a:fld id="{E9CC885B-4903-4D54-9A93-00025F12DED9}" type="datetimeFigureOut">
               <a:rPr kumimoji="1" lang="ja-JP" altLang="en-US" smtClean="0"/>
-              <a:t>2024/9/26</a:t>
+              <a:t>2025/1/6</a:t>
             </a:fld>
             <a:endParaRPr kumimoji="1" lang="ja-JP" altLang="en-US"/>
           </a:p>
@@ -5844,7 +5844,7 @@
         <p:spPr>
           <a:xfrm>
             <a:off x="567542" y="1216429"/>
-            <a:ext cx="8884163" cy="461665"/>
+            <a:ext cx="9066906" cy="461665"/>
           </a:xfrm>
           <a:prstGeom prst="rect">
             <a:avLst/>
@@ -5858,7 +5858,11 @@
           <a:lstStyle/>
           <a:p>
             <a:r>
-              <a:rPr kumimoji="1" lang="en-US" altLang="ja-JP" sz="2400" dirty="0"/>
+              <a:rPr kumimoji="1" lang="en-US" altLang="ja-JP" sz="2400" b="1" dirty="0">
+                <a:solidFill>
+                  <a:srgbClr val="FF0000"/>
+                </a:solidFill>
+              </a:rPr>
               <a:t>CollisionSphere.cpp</a:t>
             </a:r>
             <a:r>
